--- a/sqlserver-sql/presentation/sqlserver-dql-analytical-functions.pptx
+++ b/sqlserver-sql/presentation/sqlserver-dql-analytical-functions.pptx
@@ -3841,7 +3841,7 @@
             <a:pPr lvl="0"/>
             <a:r>
               <a:rPr sz="1800" dirty="0"/>
-              <a:t>Assigns a unique rank to each row, without gaps, with the same rank for rows with equal values.</a:t>
+              <a:t>Assigns the same rank to tied rows without gaps in the following ranking values.</a:t>
             </a:r>
           </a:p>
           <a:p>
@@ -3855,7 +3855,7 @@
                 </a:solidFill>
                 <a:latin typeface="Courier"/>
               </a:rPr>
-              <a:t>-- Assigns a unique integer to each distinct row within the partition of a</a:t>
+              <a:t>-- Assigns ranks within the partition; tied values share the same rank and</a:t>
             </a:r>
             <a:br>
               <a:rPr sz="1400" dirty="0"/>
@@ -3867,7 +3867,7 @@
                 </a:solidFill>
                 <a:latin typeface="Courier"/>
               </a:rPr>
-              <a:t>-- result set, without gaps in the ranking sequence.</a:t>
+              <a:t>-- no gaps appear in the following ranking values.</a:t>
             </a:r>
             <a:br>
               <a:rPr sz="1400" dirty="0"/>
@@ -11359,7 +11359,7 @@
             <a:pPr lvl="0"/>
             <a:r>
               <a:rPr sz="1800" dirty="0"/>
-              <a:t>Analytical functions in SQL Server are used to perform calculations on a group of rows and return a single result set for each group, based on the values in one or more columns, often within a specified window or partition.</a:t>
+              <a:t>Analytical functions in SQL Server perform calculations across a set of related rows and return a calculated value for each row, often within a specified window or partition.</a:t>
             </a:r>
           </a:p>
           <a:p>
@@ -16164,7 +16164,7 @@
             <a:pPr lvl="0"/>
             <a:r>
               <a:rPr sz="1800" dirty="0"/>
-              <a:t>Assigns a unique rank to each row, with the same rank for rows with equal values.</a:t>
+              <a:t>Assigns the same rank to tied rows; gaps appear in the following ranking values.</a:t>
             </a:r>
           </a:p>
           <a:p>
@@ -16178,7 +16178,7 @@
                 </a:solidFill>
                 <a:latin typeface="Courier"/>
               </a:rPr>
-              <a:t>-- Assigns a unique integer to each distinct row within the partition of a</a:t>
+              <a:t>-- Assigns ranks within the partition; tied values share the same rank and</a:t>
             </a:r>
             <a:br>
               <a:rPr sz="1400" dirty="0"/>
@@ -16190,7 +16190,7 @@
                 </a:solidFill>
                 <a:latin typeface="Courier"/>
               </a:rPr>
-              <a:t>-- result set, leaving gaps between the ranks if there are ties.</a:t>
+              <a:t>-- gaps appear in the following ranking values.</a:t>
             </a:r>
             <a:br>
               <a:rPr sz="1400" dirty="0"/>
